--- a/presentations/2026-09-04-ai-startup-study-self-intro/kangdaejong-ai-startup-study-self-intro.pptx
+++ b/presentations/2026-09-04-ai-startup-study-self-intro/kangdaejong-ai-startup-study-self-intro.pptx
@@ -1979,7 +1979,7 @@
                 <a:ea typeface="Apple SD Gothic Neo" pitchFamily="34" charset="-122"/>
                 <a:cs typeface="Apple SD Gothic Neo" pitchFamily="34" charset="-120"/>
               </a:rPr>
-              <a:t>Codex · Claude · Grok Bridge</a:t>
+              <a:t>Codex · Claude · Grok · Cursor Bridge</a:t>
             </a:r>
             <a:endParaRPr lang="en-US" sz="1000" dirty="0"/>
           </a:p>
